--- a/reports/汇报PPT.pptx
+++ b/reports/汇报PPT.pptx
@@ -18,6 +18,8 @@
     <p:sldId id="266" r:id="rId18"/>
     <p:sldId id="267" r:id="rId19"/>
     <p:sldId id="268" r:id="rId20"/>
+    <p:sldId id="269" r:id="rId21"/>
+    <p:sldId id="270" r:id="rId22"/>
   </p:sldIdLst>
   <p:sldSz cx="12191695" cy="6858000" type="screen4x3"/>
   <p:notesSz cx="6858000" cy="9144000"/>
@@ -820,6 +822,146 @@
 </file>
 
 <file path=ppt/notesSlides/notesSlide6.xml><?xml version="1.0" encoding="utf-8"?>
+<p:notes xmlns:a="http://schemas.openxmlformats.org/drawingml/2006/main" xmlns:p="http://schemas.openxmlformats.org/presentationml/2006/main" xmlns:r="http://schemas.openxmlformats.org/officeDocument/2006/relationships">
+  <p:cSld>
+    <p:spTree>
+      <p:nvGrpSpPr>
+        <p:cNvPr id="1" name=""/>
+        <p:cNvGrpSpPr/>
+        <p:nvPr/>
+      </p:nvGrpSpPr>
+      <p:grpSpPr>
+        <a:xfrm>
+          <a:off x="0" y="0"/>
+          <a:ext cx="0" cy="0"/>
+          <a:chOff x="0" y="0"/>
+          <a:chExt cx="0" cy="0"/>
+        </a:xfrm>
+      </p:grpSpPr>
+      <p:sp>
+        <p:nvSpPr>
+          <p:cNvPr id="2" name="Slide Image Placeholder 1"/>
+          <p:cNvSpPr>
+            <a:spLocks noGrp="1"/>
+          </p:cNvSpPr>
+          <p:nvPr>
+            <p:ph type="sldImg" idx="2"/>
+          </p:nvPr>
+        </p:nvSpPr>
+        <p:spPr/>
+      </p:sp>
+      <p:sp>
+        <p:nvSpPr>
+          <p:cNvPr id="3" name="Notes Placeholder 2"/>
+          <p:cNvSpPr>
+            <a:spLocks noGrp="1"/>
+          </p:cNvSpPr>
+          <p:nvPr>
+            <p:ph type="body" idx="3" sz="quarter"/>
+          </p:nvPr>
+        </p:nvSpPr>
+        <p:spPr/>
+        <p:txBody>
+          <a:bodyPr/>
+          <a:lstStyle/>
+          <a:p>
+            <a:r>
+              <a:t>这一页讲一个技术细节：为什么必须看提升度而不是置信度。</a:t>
+            </a:r>
+          </a:p>
+        </p:txBody>
+      </p:sp>
+      <p:sp>
+        <p:nvSpPr>
+          <p:cNvPr id="4" name="Slide Number Placeholder 3"/>
+          <p:cNvSpPr>
+            <a:spLocks noGrp="1"/>
+          </p:cNvSpPr>
+          <p:nvPr>
+            <p:ph type="sldNum" idx="5" sz="quarter"/>
+          </p:nvPr>
+        </p:nvSpPr>
+        <p:spPr/>
+      </p:sp>
+    </p:spTree>
+  </p:cSld>
+  <p:clrMapOvr>
+    <a:masterClrMapping/>
+  </p:clrMapOvr>
+</p:notes>
+</file>
+
+<file path=ppt/notesSlides/notesSlide7.xml><?xml version="1.0" encoding="utf-8"?>
+<p:notes xmlns:a="http://schemas.openxmlformats.org/drawingml/2006/main" xmlns:p="http://schemas.openxmlformats.org/presentationml/2006/main" xmlns:r="http://schemas.openxmlformats.org/officeDocument/2006/relationships">
+  <p:cSld>
+    <p:spTree>
+      <p:nvGrpSpPr>
+        <p:cNvPr id="1" name=""/>
+        <p:cNvGrpSpPr/>
+        <p:nvPr/>
+      </p:nvGrpSpPr>
+      <p:grpSpPr>
+        <a:xfrm>
+          <a:off x="0" y="0"/>
+          <a:ext cx="0" cy="0"/>
+          <a:chOff x="0" y="0"/>
+          <a:chExt cx="0" cy="0"/>
+        </a:xfrm>
+      </p:grpSpPr>
+      <p:sp>
+        <p:nvSpPr>
+          <p:cNvPr id="2" name="Slide Image Placeholder 1"/>
+          <p:cNvSpPr>
+            <a:spLocks noGrp="1"/>
+          </p:cNvSpPr>
+          <p:nvPr>
+            <p:ph type="sldImg" idx="2"/>
+          </p:nvPr>
+        </p:nvSpPr>
+        <p:spPr/>
+      </p:sp>
+      <p:sp>
+        <p:nvSpPr>
+          <p:cNvPr id="3" name="Notes Placeholder 2"/>
+          <p:cNvSpPr>
+            <a:spLocks noGrp="1"/>
+          </p:cNvSpPr>
+          <p:nvPr>
+            <p:ph type="body" idx="3" sz="quarter"/>
+          </p:nvPr>
+        </p:nvSpPr>
+        <p:spPr/>
+        <p:txBody>
+          <a:bodyPr/>
+          <a:lstStyle/>
+          <a:p>
+            <a:r>
+              <a:t>这页是加分项：主动说「最笨的方法赢了」，说明懂方法而不只是会调库。</a:t>
+            </a:r>
+          </a:p>
+        </p:txBody>
+      </p:sp>
+      <p:sp>
+        <p:nvSpPr>
+          <p:cNvPr id="4" name="Slide Number Placeholder 3"/>
+          <p:cNvSpPr>
+            <a:spLocks noGrp="1"/>
+          </p:cNvSpPr>
+          <p:nvPr>
+            <p:ph type="sldNum" idx="5" sz="quarter"/>
+          </p:nvPr>
+        </p:nvSpPr>
+        <p:spPr/>
+      </p:sp>
+    </p:spTree>
+  </p:cSld>
+  <p:clrMapOvr>
+    <a:masterClrMapping/>
+  </p:clrMapOvr>
+</p:notes>
+</file>
+
+<file path=ppt/notesSlides/notesSlide8.xml><?xml version="1.0" encoding="utf-8"?>
 <p:notes xmlns:a="http://schemas.openxmlformats.org/drawingml/2006/main" xmlns:p="http://schemas.openxmlformats.org/presentationml/2006/main" xmlns:r="http://schemas.openxmlformats.org/officeDocument/2006/relationships">
   <p:cSld>
     <p:spTree>
@@ -4366,7 +4508,7 @@
                 </a:solidFill>
                 <a:latin typeface="Microsoft YaHei"/>
               </a:rPr>
-              <a:t>五、运营建议</a:t>
+              <a:t>四、核心发现 ⑥　商品关联：买 A 的人也在买 B</a:t>
             </a:r>
           </a:p>
         </p:txBody>
@@ -4449,7 +4591,7 @@
                 </a:solidFill>
                 <a:latin typeface="Microsoft YaHei"/>
               </a:rPr>
-              <a:t>按 RFM 分层给出差异化动作：</a:t>
+              <a:t>方法：SQL 自连接找出同一张发票内的商品对，计算支持度 / 置信度 / 提升度</a:t>
             </a:r>
           </a:p>
           <a:p>
@@ -4465,7 +4607,30 @@
                 </a:solidFill>
                 <a:latin typeface="Microsoft YaHei"/>
               </a:rPr>
-              <a:t>· 重要价值客户（1,344）—— VIP 待遇：专属客服、优先发货、新品试用</a:t>
+              <a:t>· 频繁商品 1,789 个，共现 ≥80 次的商品对 48,028 对</a:t>
+            </a:r>
+          </a:p>
+          <a:p>
+            <a:pPr>
+              <a:spcAft>
+                <a:spcPts val="800"/>
+              </a:spcAft>
+            </a:pPr>
+          </a:p>
+          <a:p>
+            <a:pPr>
+              <a:spcAft>
+                <a:spcPts val="800"/>
+              </a:spcAft>
+            </a:pPr>
+            <a:r>
+              <a:rPr sz="1700" b="0">
+                <a:solidFill>
+                  <a:srgbClr val="1F364D"/>
+                </a:solidFill>
+                <a:latin typeface="Microsoft YaHei"/>
+              </a:rPr>
+              <a:t>提升度最高的组合 —— 全是「同款不同色 / 配套使用」：</a:t>
             </a:r>
           </a:p>
           <a:p>
@@ -4481,7 +4646,7 @@
                 </a:solidFill>
                 <a:latin typeface="Microsoft YaHei"/>
               </a:rPr>
-              <a:t>· 重要保持客户（711）—— 防流失：一对一回访、大额专属折扣</a:t>
+              <a:t>· 铸铁花园叉 ↔ 铸铁花园铲　　　　提升度 191.0</a:t>
             </a:r>
           </a:p>
           <a:p>
@@ -4497,7 +4662,7 @@
                 </a:solidFill>
                 <a:latin typeface="Microsoft YaHei"/>
               </a:rPr>
-              <a:t>· 重要挽留客户（211）—— 最紧急：强力召回券 + 电话触达</a:t>
+              <a:t>· 粉色珐琅茶罐 ↔ 粉色珐琅咖啡罐　　提升度 166.1</a:t>
             </a:r>
           </a:p>
           <a:p>
@@ -4513,7 +4678,53 @@
                 </a:solidFill>
                 <a:latin typeface="Microsoft YaHei"/>
               </a:rPr>
-              <a:t>· 重要发展客户（84）—— 提频次：满减券、组合套餐、会员积分</a:t>
+              <a:t>· 香草标签·百里香 ↔ 香草标签·迷迭香　提升度 143.0</a:t>
+            </a:r>
+          </a:p>
+          <a:p>
+            <a:pPr>
+              <a:spcAft>
+                <a:spcPts val="800"/>
+              </a:spcAft>
+            </a:pPr>
+          </a:p>
+          <a:p>
+            <a:pPr>
+              <a:spcAft>
+                <a:spcPts val="800"/>
+              </a:spcAft>
+            </a:pPr>
+            <a:r>
+              <a:rPr sz="1700" b="0">
+                <a:solidFill>
+                  <a:srgbClr val="1F364D"/>
+                </a:solidFill>
+                <a:latin typeface="Microsoft YaHei"/>
+              </a:rPr>
+              <a:t>★ 业务动作：把这些组合做成礼盒套装，直接提高客单价</a:t>
+            </a:r>
+          </a:p>
+          <a:p>
+            <a:pPr>
+              <a:spcAft>
+                <a:spcPts val="800"/>
+              </a:spcAft>
+            </a:pPr>
+          </a:p>
+          <a:p>
+            <a:pPr>
+              <a:spcAft>
+                <a:spcPts val="800"/>
+              </a:spcAft>
+            </a:pPr>
+            <a:r>
+              <a:rPr sz="1700" b="0">
+                <a:solidFill>
+                  <a:srgbClr val="1F364D"/>
+                </a:solidFill>
+                <a:latin typeface="Microsoft YaHei"/>
+              </a:rPr>
+              <a:t>⚠️ 方法论提醒：只看「置信度」会得出错误结论 —— 爆款商品的置信度天然就高。</a:t>
             </a:r>
           </a:p>
           <a:p>
@@ -4529,62 +4740,7 @@
                 </a:solidFill>
                 <a:latin typeface="Microsoft YaHei"/>
               </a:rPr>
-              <a:t>· 一般挽留客户（2,445）—— 不投预算，避免浪费</a:t>
-            </a:r>
-          </a:p>
-          <a:p>
-            <a:pPr>
-              <a:spcAft>
-                <a:spcPts val="800"/>
-              </a:spcAft>
-            </a:pPr>
-          </a:p>
-          <a:p>
-            <a:pPr>
-              <a:spcAft>
-                <a:spcPts val="800"/>
-              </a:spcAft>
-            </a:pPr>
-            <a:r>
-              <a:rPr sz="1700" b="0">
-                <a:solidFill>
-                  <a:srgbClr val="1F364D"/>
-                </a:solidFill>
-                <a:latin typeface="Microsoft YaHei"/>
-              </a:rPr>
-              <a:t>最高优先级的两件事：</a:t>
-            </a:r>
-          </a:p>
-          <a:p>
-            <a:pPr lvl="1">
-              <a:spcAft>
-                <a:spcPts val="800"/>
-              </a:spcAft>
-            </a:pPr>
-            <a:r>
-              <a:rPr sz="1500" b="0">
-                <a:solidFill>
-                  <a:srgbClr val="5A6470"/>
-                </a:solidFill>
-                <a:latin typeface="Microsoft YaHei"/>
-              </a:rPr>
-              <a:t>· 召回 211 名「重要挽留客户」—— 人数少、价值高、还来得及</a:t>
-            </a:r>
-          </a:p>
-          <a:p>
-            <a:pPr lvl="1">
-              <a:spcAft>
-                <a:spcPts val="800"/>
-              </a:spcAft>
-            </a:pPr>
-            <a:r>
-              <a:rPr sz="1500" b="0">
-                <a:solidFill>
-                  <a:srgbClr val="5A6470"/>
-                </a:solidFill>
-                <a:latin typeface="Microsoft YaHei"/>
-              </a:rPr>
-              <a:t>· 转化 27.61% 的「首购未复购」客户 —— 人数最多，而拉新成本是复购运营的 5 倍以上</a:t>
+              <a:t>· 必须用「提升度」校正：Lift &gt; 1 才说明买 A 真的促进了 B 的销售</a:t>
             </a:r>
           </a:p>
         </p:txBody>
@@ -4636,7 +4792,7 @@
                 </a:solidFill>
                 <a:latin typeface="Microsoft YaHei"/>
               </a:rPr>
-              <a:t>六、局限性与方法论反思</a:t>
+              <a:t>四、核心发现 ⑦　时间序列：最蠢的方法赢了</a:t>
             </a:r>
           </a:p>
         </p:txBody>
@@ -4719,7 +4875,46 @@
                 </a:solidFill>
                 <a:latin typeface="Microsoft YaHei"/>
               </a:rPr>
-              <a:t>诚实的局限：</a:t>
+              <a:t>数据：24 个月月度销售额（剔除只到 12 月 9 日的残缺月）</a:t>
+            </a:r>
+          </a:p>
+          <a:p>
+            <a:pPr>
+              <a:spcAft>
+                <a:spcPts val="800"/>
+              </a:spcAft>
+            </a:pPr>
+            <a:r>
+              <a:rPr sz="1700" b="0">
+                <a:solidFill>
+                  <a:srgbClr val="1F364D"/>
+                </a:solidFill>
+                <a:latin typeface="Microsoft YaHei"/>
+              </a:rPr>
+              <a:t>时间切分：前 19 个月训练、后 5 个月测试（时间序列绝不打乱）</a:t>
+            </a:r>
+          </a:p>
+          <a:p>
+            <a:pPr>
+              <a:spcAft>
+                <a:spcPts val="800"/>
+              </a:spcAft>
+            </a:pPr>
+          </a:p>
+          <a:p>
+            <a:pPr>
+              <a:spcAft>
+                <a:spcPts val="800"/>
+              </a:spcAft>
+            </a:pPr>
+            <a:r>
+              <a:rPr sz="1700" b="0">
+                <a:solidFill>
+                  <a:srgbClr val="1F364D"/>
+                </a:solidFill>
+                <a:latin typeface="Microsoft YaHei"/>
+              </a:rPr>
+              <a:t>季节性：11 月最高（+£635,932），2 月最低（−£324,396）</a:t>
             </a:r>
           </a:p>
           <a:p>
@@ -4735,7 +4930,30 @@
                 </a:solidFill>
                 <a:latin typeface="Microsoft YaHei"/>
               </a:rPr>
-              <a:t>· 数据是 2009-2011 年的英国零售数据，结论不能直接迁移到当前中国市场</a:t>
+              <a:t>· 与圣诞备货季完全吻合 —— 这是业务决定的规律，不是模型学出来的</a:t>
+            </a:r>
+          </a:p>
+          <a:p>
+            <a:pPr>
+              <a:spcAft>
+                <a:spcPts val="800"/>
+              </a:spcAft>
+            </a:pPr>
+          </a:p>
+          <a:p>
+            <a:pPr>
+              <a:spcAft>
+                <a:spcPts val="800"/>
+              </a:spcAft>
+            </a:pPr>
+            <a:r>
+              <a:rPr sz="1700" b="0">
+                <a:solidFill>
+                  <a:srgbClr val="1F364D"/>
+                </a:solidFill>
+                <a:latin typeface="Microsoft YaHei"/>
+              </a:rPr>
+              <a:t>模型对比（MAPE 越低越好）：</a:t>
             </a:r>
           </a:p>
           <a:p>
@@ -4751,7 +4969,7 @@
                 </a:solidFill>
                 <a:latin typeface="Microsoft YaHei"/>
               </a:rPr>
-              <a:t>· 无埋点行为数据 → 做不出「浏览-加购-支付」漏斗，也做不了 A/B 测试</a:t>
+              <a:t>· ① 季节朴素法（照抄去年同月）　6.77%　← 赢</a:t>
             </a:r>
           </a:p>
           <a:p>
@@ -4767,7 +4985,7 @@
                 </a:solidFill>
                 <a:latin typeface="Microsoft YaHei"/>
               </a:rPr>
-              <a:t>· 无成本数据 → 无法计算真实利润和 ROI</a:t>
+              <a:t>· ③ 线性回归 + 月度哑变量　　　　8.46%</a:t>
             </a:r>
           </a:p>
           <a:p>
@@ -4783,7 +5001,7 @@
                 </a:solidFill>
                 <a:latin typeface="Microsoft YaHei"/>
               </a:rPr>
-              <a:t>· 取消单无法回溯原订单：取消单号去掉 C 后匹配率为 0 / 8,292</a:t>
+              <a:t>· ② Holt-Winters 指数平滑　　　　拟合失败（样本不足两个周期）</a:t>
             </a:r>
           </a:p>
           <a:p>
@@ -4806,55 +5024,7 @@
                 </a:solidFill>
                 <a:latin typeface="Microsoft YaHei"/>
               </a:rPr>
-              <a:t>⭐ 方法论反思 —— 本项目最有价值的部分：</a:t>
-            </a:r>
-          </a:p>
-          <a:p>
-            <a:pPr lvl="1">
-              <a:spcAft>
-                <a:spcPts val="800"/>
-              </a:spcAft>
-            </a:pPr>
-            <a:r>
-              <a:rPr sz="1500" b="0">
-                <a:solidFill>
-                  <a:srgbClr val="5A6470"/>
-                </a:solidFill>
-                <a:latin typeface="Microsoft YaHei"/>
-              </a:rPr>
-              <a:t>· 我有 4 处预写判断被数据推翻（退货分类、客单价、周六订单、购买分布）</a:t>
-            </a:r>
-          </a:p>
-          <a:p>
-            <a:pPr lvl="1">
-              <a:spcAft>
-                <a:spcPts val="800"/>
-              </a:spcAft>
-            </a:pPr>
-            <a:r>
-              <a:rPr sz="1500" b="0">
-                <a:solidFill>
-                  <a:srgbClr val="5A6470"/>
-                </a:solidFill>
-                <a:latin typeface="Microsoft YaHei"/>
-              </a:rPr>
-              <a:t>· 其中一处，我为了「修正」它做的第二次推断也是错的</a:t>
-            </a:r>
-          </a:p>
-          <a:p>
-            <a:pPr lvl="1">
-              <a:spcAft>
-                <a:spcPts val="800"/>
-              </a:spcAft>
-            </a:pPr>
-            <a:r>
-              <a:rPr sz="1500" b="0">
-                <a:solidFill>
-                  <a:srgbClr val="5A6470"/>
-                </a:solidFill>
-                <a:latin typeface="Microsoft YaHei"/>
-              </a:rPr>
-              <a:t>· 由此确立纪律：任何「我觉得应该是」，先跑一条 SQL 验证再写进报告</a:t>
+              <a:t>★ 教训：任何复杂模型都必须先打得过最简单的基线。</a:t>
             </a:r>
           </a:p>
         </p:txBody>
@@ -4868,6 +5038,546 @@
 </file>
 
 <file path=ppt/slides/slide13.xml><?xml version="1.0" encoding="utf-8"?>
+<p:sld xmlns:a="http://schemas.openxmlformats.org/drawingml/2006/main" xmlns:p="http://schemas.openxmlformats.org/presentationml/2006/main" xmlns:r="http://schemas.openxmlformats.org/officeDocument/2006/relationships">
+  <p:cSld>
+    <p:spTree>
+      <p:nvGrpSpPr>
+        <p:cNvPr id="1" name=""/>
+        <p:cNvGrpSpPr/>
+        <p:nvPr/>
+      </p:nvGrpSpPr>
+      <p:grpSpPr/>
+      <p:sp>
+        <p:nvSpPr>
+          <p:cNvPr id="2" name="TextBox 1"/>
+          <p:cNvSpPr txBox="1"/>
+          <p:nvPr/>
+        </p:nvSpPr>
+        <p:spPr>
+          <a:xfrm>
+            <a:off x="640080" y="384048"/>
+            <a:ext cx="10881360" cy="822960"/>
+          </a:xfrm>
+          <a:prstGeom prst="rect">
+            <a:avLst/>
+          </a:prstGeom>
+          <a:noFill/>
+        </p:spPr>
+        <p:txBody>
+          <a:bodyPr wrap="none">
+            <a:spAutoFit/>
+          </a:bodyPr>
+          <a:lstStyle/>
+          <a:p>
+            <a:r>
+              <a:rPr sz="3000" b="1">
+                <a:solidFill>
+                  <a:srgbClr val="1F364D"/>
+                </a:solidFill>
+                <a:latin typeface="Microsoft YaHei"/>
+              </a:rPr>
+              <a:t>五、运营建议</a:t>
+            </a:r>
+          </a:p>
+        </p:txBody>
+      </p:sp>
+      <p:sp>
+        <p:nvSpPr>
+          <p:cNvPr id="3" name="Rectangle 2"/>
+          <p:cNvSpPr/>
+          <p:nvPr/>
+        </p:nvSpPr>
+        <p:spPr>
+          <a:xfrm>
+            <a:off x="640080" y="1207008"/>
+            <a:ext cx="10881360" cy="25000"/>
+          </a:xfrm>
+          <a:prstGeom prst="rect">
+            <a:avLst/>
+          </a:prstGeom>
+          <a:solidFill>
+            <a:srgbClr val="2E6DA4"/>
+          </a:solidFill>
+          <a:ln>
+            <a:noFill/>
+          </a:ln>
+          <a:effectLst/>
+        </p:spPr>
+        <p:style>
+          <a:lnRef idx="1">
+            <a:schemeClr val="accent1"/>
+          </a:lnRef>
+          <a:fillRef idx="3">
+            <a:schemeClr val="accent1"/>
+          </a:fillRef>
+          <a:effectRef idx="2">
+            <a:schemeClr val="accent1"/>
+          </a:effectRef>
+          <a:fontRef idx="minor">
+            <a:schemeClr val="lt1"/>
+          </a:fontRef>
+        </p:style>
+        <p:txBody>
+          <a:bodyPr rtlCol="0" anchor="ctr"/>
+          <a:lstStyle/>
+          <a:p>
+            <a:pPr algn="ctr"/>
+          </a:p>
+        </p:txBody>
+      </p:sp>
+      <p:sp>
+        <p:nvSpPr>
+          <p:cNvPr id="4" name="TextBox 3"/>
+          <p:cNvSpPr txBox="1"/>
+          <p:nvPr/>
+        </p:nvSpPr>
+        <p:spPr>
+          <a:xfrm>
+            <a:off x="822960" y="1554480"/>
+            <a:ext cx="10698480" cy="4846320"/>
+          </a:xfrm>
+          <a:prstGeom prst="rect">
+            <a:avLst/>
+          </a:prstGeom>
+          <a:noFill/>
+        </p:spPr>
+        <p:txBody>
+          <a:bodyPr wrap="square">
+            <a:spAutoFit/>
+          </a:bodyPr>
+          <a:lstStyle/>
+          <a:p>
+            <a:pPr>
+              <a:spcAft>
+                <a:spcPts val="800"/>
+              </a:spcAft>
+            </a:pPr>
+            <a:r>
+              <a:rPr sz="1700" b="0">
+                <a:solidFill>
+                  <a:srgbClr val="1F364D"/>
+                </a:solidFill>
+                <a:latin typeface="Microsoft YaHei"/>
+              </a:rPr>
+              <a:t>按 RFM 分层给出差异化动作：</a:t>
+            </a:r>
+          </a:p>
+          <a:p>
+            <a:pPr lvl="1">
+              <a:spcAft>
+                <a:spcPts val="800"/>
+              </a:spcAft>
+            </a:pPr>
+            <a:r>
+              <a:rPr sz="1500" b="0">
+                <a:solidFill>
+                  <a:srgbClr val="5A6470"/>
+                </a:solidFill>
+                <a:latin typeface="Microsoft YaHei"/>
+              </a:rPr>
+              <a:t>· 重要价值客户（1,344）—— VIP 待遇：专属客服、优先发货、新品试用</a:t>
+            </a:r>
+          </a:p>
+          <a:p>
+            <a:pPr lvl="1">
+              <a:spcAft>
+                <a:spcPts val="800"/>
+              </a:spcAft>
+            </a:pPr>
+            <a:r>
+              <a:rPr sz="1500" b="0">
+                <a:solidFill>
+                  <a:srgbClr val="5A6470"/>
+                </a:solidFill>
+                <a:latin typeface="Microsoft YaHei"/>
+              </a:rPr>
+              <a:t>· 重要保持客户（711）—— 防流失：一对一回访、大额专属折扣</a:t>
+            </a:r>
+          </a:p>
+          <a:p>
+            <a:pPr lvl="1">
+              <a:spcAft>
+                <a:spcPts val="800"/>
+              </a:spcAft>
+            </a:pPr>
+            <a:r>
+              <a:rPr sz="1500" b="0">
+                <a:solidFill>
+                  <a:srgbClr val="5A6470"/>
+                </a:solidFill>
+                <a:latin typeface="Microsoft YaHei"/>
+              </a:rPr>
+              <a:t>· 重要挽留客户（211）—— 最紧急：强力召回券 + 电话触达</a:t>
+            </a:r>
+          </a:p>
+          <a:p>
+            <a:pPr lvl="1">
+              <a:spcAft>
+                <a:spcPts val="800"/>
+              </a:spcAft>
+            </a:pPr>
+            <a:r>
+              <a:rPr sz="1500" b="0">
+                <a:solidFill>
+                  <a:srgbClr val="5A6470"/>
+                </a:solidFill>
+                <a:latin typeface="Microsoft YaHei"/>
+              </a:rPr>
+              <a:t>· 重要发展客户（84）—— 提频次：满减券、组合套餐、会员积分</a:t>
+            </a:r>
+          </a:p>
+          <a:p>
+            <a:pPr lvl="1">
+              <a:spcAft>
+                <a:spcPts val="800"/>
+              </a:spcAft>
+            </a:pPr>
+            <a:r>
+              <a:rPr sz="1500" b="0">
+                <a:solidFill>
+                  <a:srgbClr val="5A6470"/>
+                </a:solidFill>
+                <a:latin typeface="Microsoft YaHei"/>
+              </a:rPr>
+              <a:t>· 一般挽留客户（2,445）—— 不投预算，避免浪费</a:t>
+            </a:r>
+          </a:p>
+          <a:p>
+            <a:pPr>
+              <a:spcAft>
+                <a:spcPts val="800"/>
+              </a:spcAft>
+            </a:pPr>
+          </a:p>
+          <a:p>
+            <a:pPr>
+              <a:spcAft>
+                <a:spcPts val="800"/>
+              </a:spcAft>
+            </a:pPr>
+            <a:r>
+              <a:rPr sz="1700" b="0">
+                <a:solidFill>
+                  <a:srgbClr val="1F364D"/>
+                </a:solidFill>
+                <a:latin typeface="Microsoft YaHei"/>
+              </a:rPr>
+              <a:t>最高优先级的两件事：</a:t>
+            </a:r>
+          </a:p>
+          <a:p>
+            <a:pPr lvl="1">
+              <a:spcAft>
+                <a:spcPts val="800"/>
+              </a:spcAft>
+            </a:pPr>
+            <a:r>
+              <a:rPr sz="1500" b="0">
+                <a:solidFill>
+                  <a:srgbClr val="5A6470"/>
+                </a:solidFill>
+                <a:latin typeface="Microsoft YaHei"/>
+              </a:rPr>
+              <a:t>· 召回 211 名「重要挽留客户」—— 人数少、价值高、还来得及</a:t>
+            </a:r>
+          </a:p>
+          <a:p>
+            <a:pPr lvl="1">
+              <a:spcAft>
+                <a:spcPts val="800"/>
+              </a:spcAft>
+            </a:pPr>
+            <a:r>
+              <a:rPr sz="1500" b="0">
+                <a:solidFill>
+                  <a:srgbClr val="5A6470"/>
+                </a:solidFill>
+                <a:latin typeface="Microsoft YaHei"/>
+              </a:rPr>
+              <a:t>· 转化 27.61% 的「首购未复购」客户 —— 人数最多，而拉新成本是复购运营的 5 倍以上</a:t>
+            </a:r>
+          </a:p>
+        </p:txBody>
+      </p:sp>
+    </p:spTree>
+  </p:cSld>
+  <p:clrMapOvr>
+    <a:masterClrMapping/>
+  </p:clrMapOvr>
+</p:sld>
+</file>
+
+<file path=ppt/slides/slide14.xml><?xml version="1.0" encoding="utf-8"?>
+<p:sld xmlns:a="http://schemas.openxmlformats.org/drawingml/2006/main" xmlns:p="http://schemas.openxmlformats.org/presentationml/2006/main" xmlns:r="http://schemas.openxmlformats.org/officeDocument/2006/relationships">
+  <p:cSld>
+    <p:spTree>
+      <p:nvGrpSpPr>
+        <p:cNvPr id="1" name=""/>
+        <p:cNvGrpSpPr/>
+        <p:nvPr/>
+      </p:nvGrpSpPr>
+      <p:grpSpPr/>
+      <p:sp>
+        <p:nvSpPr>
+          <p:cNvPr id="2" name="TextBox 1"/>
+          <p:cNvSpPr txBox="1"/>
+          <p:nvPr/>
+        </p:nvSpPr>
+        <p:spPr>
+          <a:xfrm>
+            <a:off x="640080" y="384048"/>
+            <a:ext cx="10881360" cy="822960"/>
+          </a:xfrm>
+          <a:prstGeom prst="rect">
+            <a:avLst/>
+          </a:prstGeom>
+          <a:noFill/>
+        </p:spPr>
+        <p:txBody>
+          <a:bodyPr wrap="none">
+            <a:spAutoFit/>
+          </a:bodyPr>
+          <a:lstStyle/>
+          <a:p>
+            <a:r>
+              <a:rPr sz="3000" b="1">
+                <a:solidFill>
+                  <a:srgbClr val="1F364D"/>
+                </a:solidFill>
+                <a:latin typeface="Microsoft YaHei"/>
+              </a:rPr>
+              <a:t>六、局限性与方法论反思</a:t>
+            </a:r>
+          </a:p>
+        </p:txBody>
+      </p:sp>
+      <p:sp>
+        <p:nvSpPr>
+          <p:cNvPr id="3" name="Rectangle 2"/>
+          <p:cNvSpPr/>
+          <p:nvPr/>
+        </p:nvSpPr>
+        <p:spPr>
+          <a:xfrm>
+            <a:off x="640080" y="1207008"/>
+            <a:ext cx="10881360" cy="25000"/>
+          </a:xfrm>
+          <a:prstGeom prst="rect">
+            <a:avLst/>
+          </a:prstGeom>
+          <a:solidFill>
+            <a:srgbClr val="2E6DA4"/>
+          </a:solidFill>
+          <a:ln>
+            <a:noFill/>
+          </a:ln>
+          <a:effectLst/>
+        </p:spPr>
+        <p:style>
+          <a:lnRef idx="1">
+            <a:schemeClr val="accent1"/>
+          </a:lnRef>
+          <a:fillRef idx="3">
+            <a:schemeClr val="accent1"/>
+          </a:fillRef>
+          <a:effectRef idx="2">
+            <a:schemeClr val="accent1"/>
+          </a:effectRef>
+          <a:fontRef idx="minor">
+            <a:schemeClr val="lt1"/>
+          </a:fontRef>
+        </p:style>
+        <p:txBody>
+          <a:bodyPr rtlCol="0" anchor="ctr"/>
+          <a:lstStyle/>
+          <a:p>
+            <a:pPr algn="ctr"/>
+          </a:p>
+        </p:txBody>
+      </p:sp>
+      <p:sp>
+        <p:nvSpPr>
+          <p:cNvPr id="4" name="TextBox 3"/>
+          <p:cNvSpPr txBox="1"/>
+          <p:nvPr/>
+        </p:nvSpPr>
+        <p:spPr>
+          <a:xfrm>
+            <a:off x="822960" y="1554480"/>
+            <a:ext cx="10698480" cy="4846320"/>
+          </a:xfrm>
+          <a:prstGeom prst="rect">
+            <a:avLst/>
+          </a:prstGeom>
+          <a:noFill/>
+        </p:spPr>
+        <p:txBody>
+          <a:bodyPr wrap="square">
+            <a:spAutoFit/>
+          </a:bodyPr>
+          <a:lstStyle/>
+          <a:p>
+            <a:pPr>
+              <a:spcAft>
+                <a:spcPts val="800"/>
+              </a:spcAft>
+            </a:pPr>
+            <a:r>
+              <a:rPr sz="1700" b="0">
+                <a:solidFill>
+                  <a:srgbClr val="1F364D"/>
+                </a:solidFill>
+                <a:latin typeface="Microsoft YaHei"/>
+              </a:rPr>
+              <a:t>诚实的局限：</a:t>
+            </a:r>
+          </a:p>
+          <a:p>
+            <a:pPr lvl="1">
+              <a:spcAft>
+                <a:spcPts val="800"/>
+              </a:spcAft>
+            </a:pPr>
+            <a:r>
+              <a:rPr sz="1500" b="0">
+                <a:solidFill>
+                  <a:srgbClr val="5A6470"/>
+                </a:solidFill>
+                <a:latin typeface="Microsoft YaHei"/>
+              </a:rPr>
+              <a:t>· 数据是 2009-2011 年的英国零售数据，结论不能直接迁移到当前中国市场</a:t>
+            </a:r>
+          </a:p>
+          <a:p>
+            <a:pPr lvl="1">
+              <a:spcAft>
+                <a:spcPts val="800"/>
+              </a:spcAft>
+            </a:pPr>
+            <a:r>
+              <a:rPr sz="1500" b="0">
+                <a:solidFill>
+                  <a:srgbClr val="5A6470"/>
+                </a:solidFill>
+                <a:latin typeface="Microsoft YaHei"/>
+              </a:rPr>
+              <a:t>· 无埋点行为数据 → 做不出「浏览-加购-支付」漏斗，也做不了 A/B 测试</a:t>
+            </a:r>
+          </a:p>
+          <a:p>
+            <a:pPr lvl="1">
+              <a:spcAft>
+                <a:spcPts val="800"/>
+              </a:spcAft>
+            </a:pPr>
+            <a:r>
+              <a:rPr sz="1500" b="0">
+                <a:solidFill>
+                  <a:srgbClr val="5A6470"/>
+                </a:solidFill>
+                <a:latin typeface="Microsoft YaHei"/>
+              </a:rPr>
+              <a:t>· 无成本数据 → 无法计算真实利润和 ROI</a:t>
+            </a:r>
+          </a:p>
+          <a:p>
+            <a:pPr lvl="1">
+              <a:spcAft>
+                <a:spcPts val="800"/>
+              </a:spcAft>
+            </a:pPr>
+            <a:r>
+              <a:rPr sz="1500" b="0">
+                <a:solidFill>
+                  <a:srgbClr val="5A6470"/>
+                </a:solidFill>
+                <a:latin typeface="Microsoft YaHei"/>
+              </a:rPr>
+              <a:t>· 取消单无法回溯原订单：取消单号去掉 C 后匹配率为 0 / 8,292</a:t>
+            </a:r>
+          </a:p>
+          <a:p>
+            <a:pPr>
+              <a:spcAft>
+                <a:spcPts val="800"/>
+              </a:spcAft>
+            </a:pPr>
+          </a:p>
+          <a:p>
+            <a:pPr>
+              <a:spcAft>
+                <a:spcPts val="800"/>
+              </a:spcAft>
+            </a:pPr>
+            <a:r>
+              <a:rPr sz="1700" b="0">
+                <a:solidFill>
+                  <a:srgbClr val="1F364D"/>
+                </a:solidFill>
+                <a:latin typeface="Microsoft YaHei"/>
+              </a:rPr>
+              <a:t>⭐ 方法论反思 —— 本项目最有价值的部分：</a:t>
+            </a:r>
+          </a:p>
+          <a:p>
+            <a:pPr lvl="1">
+              <a:spcAft>
+                <a:spcPts val="800"/>
+              </a:spcAft>
+            </a:pPr>
+            <a:r>
+              <a:rPr sz="1500" b="0">
+                <a:solidFill>
+                  <a:srgbClr val="5A6470"/>
+                </a:solidFill>
+                <a:latin typeface="Microsoft YaHei"/>
+              </a:rPr>
+              <a:t>· 我有 5 处预写判断被数据推翻（退货分类、客单价、周六订单、购买分布、季节月份）</a:t>
+            </a:r>
+          </a:p>
+          <a:p>
+            <a:pPr lvl="1">
+              <a:spcAft>
+                <a:spcPts val="800"/>
+              </a:spcAft>
+            </a:pPr>
+            <a:r>
+              <a:rPr sz="1500" b="0">
+                <a:solidFill>
+                  <a:srgbClr val="5A6470"/>
+                </a:solidFill>
+                <a:latin typeface="Microsoft YaHei"/>
+              </a:rPr>
+              <a:t>· 其中一处，我为了「修正」它做的第二次推断也是错的</a:t>
+            </a:r>
+          </a:p>
+          <a:p>
+            <a:pPr lvl="1">
+              <a:spcAft>
+                <a:spcPts val="800"/>
+              </a:spcAft>
+            </a:pPr>
+            <a:r>
+              <a:rPr sz="1500" b="0">
+                <a:solidFill>
+                  <a:srgbClr val="5A6470"/>
+                </a:solidFill>
+                <a:latin typeface="Microsoft YaHei"/>
+              </a:rPr>
+              <a:t>· 由此确立纪律：任何「我觉得应该是」，先跑一条 SQL 验证再写进报告</a:t>
+            </a:r>
+          </a:p>
+        </p:txBody>
+      </p:sp>
+    </p:spTree>
+  </p:cSld>
+  <p:clrMapOvr>
+    <a:masterClrMapping/>
+  </p:clrMapOvr>
+</p:sld>
+</file>
+
+<file path=ppt/slides/slide15.xml><?xml version="1.0" encoding="utf-8"?>
 <p:sld xmlns:a="http://schemas.openxmlformats.org/drawingml/2006/main" xmlns:p="http://schemas.openxmlformats.org/presentationml/2006/main" xmlns:r="http://schemas.openxmlformats.org/officeDocument/2006/relationships">
   <p:cSld>
     <p:spTree>
@@ -5201,7 +5911,7 @@
                 </a:solidFill>
                 <a:latin typeface="Microsoft YaHei"/>
               </a:rPr>
-              <a:t>四、核心发现（5 个）</a:t>
+              <a:t>四、核心发现（7 个）</a:t>
             </a:r>
           </a:p>
           <a:p>
